--- a/m5/diapositivos/sessao-09-m5-f14.pptx
+++ b/m5/diapositivos/sessao-09-m5-f14.pptx
@@ -2590,7 +2590,7 @@
               <a:buNone/>
             </a:pPr>
             <a:r>
-              <a:rPr lang="en-US" sz="2300" dirty="0">
+              <a:rPr lang="en-US" sz="2300" i="1" dirty="0">
                 <a:solidFill>
                   <a:srgbClr val="F2F0EA"/>
                 </a:solidFill>
@@ -2598,7 +2598,92 @@
                 <a:ea typeface="Georgia" pitchFamily="34" charset="-122"/>
                 <a:cs typeface="Georgia" pitchFamily="34" charset="-120"/>
               </a:rPr>
-              <a:t>Os Maias: Cenas da Vida Romântica, escrito e realizado por João Botelho, estreou nos cinemas em 2014 e deu origem a uma minissérie exibida pela RTP1 (28 de dezembro de 2015). O texto do narrador de Eça é dito por Jorge Vaz de Carvalho. Vês os episódios que o docente indicar.</a:t>
+              <a:t>Os Maias: Cenas da Vida Romântica</a:t>
+            </a:r>
+            <a:pPr indent="0" marL="0">
+              <a:lnSpc>
+                <a:spcPct val="120000"/>
+              </a:lnSpc>
+              <a:buNone/>
+            </a:pPr>
+            <a:r>
+              <a:rPr lang="en-US" sz="2300" dirty="0">
+                <a:solidFill>
+                  <a:srgbClr val="F2F0EA"/>
+                </a:solidFill>
+                <a:latin typeface="Georgia" pitchFamily="34" charset="0"/>
+                <a:ea typeface="Georgia" pitchFamily="34" charset="-122"/>
+                <a:cs typeface="Georgia" pitchFamily="34" charset="-120"/>
+              </a:rPr>
+              <a:t>, escrito e realizado por </a:t>
+            </a:r>
+            <a:pPr indent="0" marL="0">
+              <a:lnSpc>
+                <a:spcPct val="120000"/>
+              </a:lnSpc>
+              <a:buNone/>
+            </a:pPr>
+            <a:r>
+              <a:rPr lang="en-US" sz="2300" b="1" dirty="0">
+                <a:solidFill>
+                  <a:srgbClr val="F2F0EA"/>
+                </a:solidFill>
+                <a:latin typeface="Georgia" pitchFamily="34" charset="0"/>
+                <a:ea typeface="Georgia" pitchFamily="34" charset="-122"/>
+                <a:cs typeface="Georgia" pitchFamily="34" charset="-120"/>
+              </a:rPr>
+              <a:t>João Botelho</a:t>
+            </a:r>
+            <a:pPr indent="0" marL="0">
+              <a:lnSpc>
+                <a:spcPct val="120000"/>
+              </a:lnSpc>
+              <a:buNone/>
+            </a:pPr>
+            <a:r>
+              <a:rPr lang="en-US" sz="2300" dirty="0">
+                <a:solidFill>
+                  <a:srgbClr val="F2F0EA"/>
+                </a:solidFill>
+                <a:latin typeface="Georgia" pitchFamily="34" charset="0"/>
+                <a:ea typeface="Georgia" pitchFamily="34" charset="-122"/>
+                <a:cs typeface="Georgia" pitchFamily="34" charset="-120"/>
+              </a:rPr>
+              <a:t>, estreou nos cinemas em 2014 e deu origem a uma </a:t>
+            </a:r>
+            <a:pPr indent="0" marL="0">
+              <a:lnSpc>
+                <a:spcPct val="120000"/>
+              </a:lnSpc>
+              <a:buNone/>
+            </a:pPr>
+            <a:r>
+              <a:rPr lang="en-US" sz="2300" b="1" dirty="0">
+                <a:solidFill>
+                  <a:srgbClr val="F2F0EA"/>
+                </a:solidFill>
+                <a:latin typeface="Georgia" pitchFamily="34" charset="0"/>
+                <a:ea typeface="Georgia" pitchFamily="34" charset="-122"/>
+                <a:cs typeface="Georgia" pitchFamily="34" charset="-120"/>
+              </a:rPr>
+              <a:t>minissérie</a:t>
+            </a:r>
+            <a:pPr indent="0" marL="0">
+              <a:lnSpc>
+                <a:spcPct val="120000"/>
+              </a:lnSpc>
+              <a:buNone/>
+            </a:pPr>
+            <a:r>
+              <a:rPr lang="en-US" sz="2300" dirty="0">
+                <a:solidFill>
+                  <a:srgbClr val="F2F0EA"/>
+                </a:solidFill>
+                <a:latin typeface="Georgia" pitchFamily="34" charset="0"/>
+                <a:ea typeface="Georgia" pitchFamily="34" charset="-122"/>
+                <a:cs typeface="Georgia" pitchFamily="34" charset="-120"/>
+              </a:rPr>
+              <a:t> exibida pela RTP1 (28 de dezembro de 2015). O texto do narrador de Eça é dito por Jorge Vaz de Carvalho. Vês os episódios que o docente indicar.</a:t>
             </a:r>
             <a:endParaRPr lang="en-US" sz="2300" dirty="0"/>
           </a:p>
@@ -2997,6 +3082,23 @@
               <a:buNone/>
             </a:pPr>
             <a:r>
+              <a:rPr lang="en-US" sz="2200" i="1" dirty="0">
+                <a:solidFill>
+                  <a:srgbClr val="F2F0EA"/>
+                </a:solidFill>
+                <a:latin typeface="Arial" pitchFamily="34" charset="0"/>
+                <a:ea typeface="Arial" pitchFamily="34" charset="-122"/>
+                <a:cs typeface="Arial" pitchFamily="34" charset="-120"/>
+              </a:rPr>
+              <a:t>Os Maias: Cenas da Vida Romântica</a:t>
+            </a:r>
+            <a:pPr indent="0" marL="0">
+              <a:lnSpc>
+                <a:spcPct val="105000"/>
+              </a:lnSpc>
+              <a:buNone/>
+            </a:pPr>
+            <a:r>
               <a:rPr lang="en-US" sz="2200" dirty="0">
                 <a:solidFill>
                   <a:srgbClr val="F2F0EA"/>
@@ -3005,7 +3107,7 @@
                 <a:ea typeface="Arial" pitchFamily="34" charset="-122"/>
                 <a:cs typeface="Arial" pitchFamily="34" charset="-120"/>
               </a:rPr>
-              <a:t>Os Maias: Cenas da Vida Romântica, escrito e realizado por João Botelho, estreou nos cinemas em 2014 e deu origem a uma minissérie exibida pela RTP1 em 2015.</a:t>
+              <a:t>, escrito e realizado por João Botelho, estreou nos cinemas em 2014 e deu origem a uma minissérie exibida pela RTP1 em 2015.</a:t>
             </a:r>
             <a:endParaRPr lang="en-US" sz="2200" dirty="0"/>
           </a:p>
@@ -6288,7 +6390,87 @@
                 <a:ea typeface="Georgia" pitchFamily="34" charset="-122"/>
                 <a:cs typeface="Georgia" pitchFamily="34" charset="-120"/>
               </a:rPr>
-              <a:t>Paula Rego pintou O Crime do Padre Amaro, de Eça, numa série. Como numa adaptação de Os Maias, pergunta-te o que a pintura ganhou e deixou de fora.</a:t>
+              <a:t>Paula Rego pintou </a:t>
+            </a:r>
+            <a:pPr indent="0" marL="0">
+              <a:lnSpc>
+                <a:spcPct val="110000"/>
+              </a:lnSpc>
+              <a:spcAft>
+                <a:spcPts val="1400"/>
+              </a:spcAft>
+              <a:buNone/>
+            </a:pPr>
+            <a:r>
+              <a:rPr lang="en-US" sz="2800" i="1" dirty="0">
+                <a:solidFill>
+                  <a:srgbClr val="F2F0EA"/>
+                </a:solidFill>
+                <a:latin typeface="Georgia" pitchFamily="34" charset="0"/>
+                <a:ea typeface="Georgia" pitchFamily="34" charset="-122"/>
+                <a:cs typeface="Georgia" pitchFamily="34" charset="-120"/>
+              </a:rPr>
+              <a:t>O Crime do Padre Amaro</a:t>
+            </a:r>
+            <a:pPr indent="0" marL="0">
+              <a:lnSpc>
+                <a:spcPct val="110000"/>
+              </a:lnSpc>
+              <a:spcAft>
+                <a:spcPts val="1400"/>
+              </a:spcAft>
+              <a:buNone/>
+            </a:pPr>
+            <a:r>
+              <a:rPr lang="en-US" sz="2800" dirty="0">
+                <a:solidFill>
+                  <a:srgbClr val="F2F0EA"/>
+                </a:solidFill>
+                <a:latin typeface="Georgia" pitchFamily="34" charset="0"/>
+                <a:ea typeface="Georgia" pitchFamily="34" charset="-122"/>
+                <a:cs typeface="Georgia" pitchFamily="34" charset="-120"/>
+              </a:rPr>
+              <a:t>, de Eça, numa série. Como numa adaptação de </a:t>
+            </a:r>
+            <a:pPr indent="0" marL="0">
+              <a:lnSpc>
+                <a:spcPct val="110000"/>
+              </a:lnSpc>
+              <a:spcAft>
+                <a:spcPts val="1400"/>
+              </a:spcAft>
+              <a:buNone/>
+            </a:pPr>
+            <a:r>
+              <a:rPr lang="en-US" sz="2800" i="1" dirty="0">
+                <a:solidFill>
+                  <a:srgbClr val="F2F0EA"/>
+                </a:solidFill>
+                <a:latin typeface="Georgia" pitchFamily="34" charset="0"/>
+                <a:ea typeface="Georgia" pitchFamily="34" charset="-122"/>
+                <a:cs typeface="Georgia" pitchFamily="34" charset="-120"/>
+              </a:rPr>
+              <a:t>Os Maias</a:t>
+            </a:r>
+            <a:pPr indent="0" marL="0">
+              <a:lnSpc>
+                <a:spcPct val="110000"/>
+              </a:lnSpc>
+              <a:spcAft>
+                <a:spcPts val="1400"/>
+              </a:spcAft>
+              <a:buNone/>
+            </a:pPr>
+            <a:r>
+              <a:rPr lang="en-US" sz="2800" dirty="0">
+                <a:solidFill>
+                  <a:srgbClr val="F2F0EA"/>
+                </a:solidFill>
+                <a:latin typeface="Georgia" pitchFamily="34" charset="0"/>
+                <a:ea typeface="Georgia" pitchFamily="34" charset="-122"/>
+                <a:cs typeface="Georgia" pitchFamily="34" charset="-120"/>
+              </a:rPr>
+              <a:t>, pergunta-te o que a pintura ganhou e deixou de fora.</a:t>
             </a:r>
             <a:endParaRPr lang="en-US" sz="2800" dirty="0"/>
           </a:p>
@@ -6695,7 +6877,41 @@
                 <a:ea typeface="Arial" pitchFamily="34" charset="-122"/>
                 <a:cs typeface="Arial" pitchFamily="34" charset="-120"/>
               </a:rPr>
-              <a:t>A voz off, que se ouve sem se ver quem fala, diz as frases de Eça: o filme ganha a ironia do narrador e pode perder ritmo.</a:t>
+              <a:t>A voz </a:t>
+            </a:r>
+            <a:pPr indent="0" marL="0">
+              <a:lnSpc>
+                <a:spcPct val="105000"/>
+              </a:lnSpc>
+              <a:buNone/>
+            </a:pPr>
+            <a:r>
+              <a:rPr lang="en-US" sz="2200" i="1" dirty="0">
+                <a:solidFill>
+                  <a:srgbClr val="F2F0EA"/>
+                </a:solidFill>
+                <a:latin typeface="Arial" pitchFamily="34" charset="0"/>
+                <a:ea typeface="Arial" pitchFamily="34" charset="-122"/>
+                <a:cs typeface="Arial" pitchFamily="34" charset="-120"/>
+              </a:rPr>
+              <a:t>off</a:t>
+            </a:r>
+            <a:pPr indent="0" marL="0">
+              <a:lnSpc>
+                <a:spcPct val="105000"/>
+              </a:lnSpc>
+              <a:buNone/>
+            </a:pPr>
+            <a:r>
+              <a:rPr lang="en-US" sz="2200" dirty="0">
+                <a:solidFill>
+                  <a:srgbClr val="F2F0EA"/>
+                </a:solidFill>
+                <a:latin typeface="Arial" pitchFamily="34" charset="0"/>
+                <a:ea typeface="Arial" pitchFamily="34" charset="-122"/>
+                <a:cs typeface="Arial" pitchFamily="34" charset="-120"/>
+              </a:rPr>
+              <a:t>, que se ouve sem se ver quem fala, diz as frases de Eça: o filme ganha a ironia do narrador e pode perder ritmo.</a:t>
             </a:r>
             <a:endParaRPr lang="en-US" sz="2200" dirty="0"/>
           </a:p>

--- a/m5/diapositivos/sessao-09-m5-f14.pptx
+++ b/m5/diapositivos/sessao-09-m5-f14.pptx
@@ -6390,7 +6390,7 @@
                 <a:ea typeface="Georgia" pitchFamily="34" charset="-122"/>
                 <a:cs typeface="Georgia" pitchFamily="34" charset="-120"/>
               </a:rPr>
-              <a:t>Paula Rego pintou </a:t>
+              <a:t>Em 1997 e 1998, Paula Rego faz uma série de obras a partir de </a:t>
             </a:r>
             <a:pPr indent="0" marL="0">
               <a:lnSpc>
@@ -6430,47 +6430,7 @@
                 <a:ea typeface="Georgia" pitchFamily="34" charset="-122"/>
                 <a:cs typeface="Georgia" pitchFamily="34" charset="-120"/>
               </a:rPr>
-              <a:t>, de Eça, numa série. Como numa adaptação de </a:t>
-            </a:r>
-            <a:pPr indent="0" marL="0">
-              <a:lnSpc>
-                <a:spcPct val="110000"/>
-              </a:lnSpc>
-              <a:spcAft>
-                <a:spcPts val="1400"/>
-              </a:spcAft>
-              <a:buNone/>
-            </a:pPr>
-            <a:r>
-              <a:rPr lang="en-US" sz="2800" i="1" dirty="0">
-                <a:solidFill>
-                  <a:srgbClr val="F2F0EA"/>
-                </a:solidFill>
-                <a:latin typeface="Georgia" pitchFamily="34" charset="0"/>
-                <a:ea typeface="Georgia" pitchFamily="34" charset="-122"/>
-                <a:cs typeface="Georgia" pitchFamily="34" charset="-120"/>
-              </a:rPr>
-              <a:t>Os Maias</a:t>
-            </a:r>
-            <a:pPr indent="0" marL="0">
-              <a:lnSpc>
-                <a:spcPct val="110000"/>
-              </a:lnSpc>
-              <a:spcAft>
-                <a:spcPts val="1400"/>
-              </a:spcAft>
-              <a:buNone/>
-            </a:pPr>
-            <a:r>
-              <a:rPr lang="en-US" sz="2800" dirty="0">
-                <a:solidFill>
-                  <a:srgbClr val="F2F0EA"/>
-                </a:solidFill>
-                <a:latin typeface="Georgia" pitchFamily="34" charset="0"/>
-                <a:ea typeface="Georgia" pitchFamily="34" charset="-122"/>
-                <a:cs typeface="Georgia" pitchFamily="34" charset="-120"/>
-              </a:rPr>
-              <a:t>, pergunta-te o que a pintura ganhou e deixou de fora.</a:t>
+              <a:t>, de Eça; a Gulbenkian mostra-a em Lisboa em 1999.</a:t>
             </a:r>
             <a:endParaRPr lang="en-US" sz="2800" dirty="0"/>
           </a:p>

--- a/m5/diapositivos/sessao-09-m5-f14.pptx
+++ b/m5/diapositivos/sessao-09-m5-f14.pptx
@@ -6318,7 +6318,7 @@
                 <a:ea typeface="Arial" pitchFamily="34" charset="-122"/>
                 <a:cs typeface="Arial" pitchFamily="34" charset="-120"/>
               </a:rPr>
-              <a:t>Paula Rego, Portugal</a:t>
+              <a:t>João Botelho, Portugal</a:t>
             </a:r>
             <a:endParaRPr lang="en-US" sz="3400" dirty="0"/>
           </a:p>
@@ -6390,7 +6390,7 @@
                 <a:ea typeface="Georgia" pitchFamily="34" charset="-122"/>
                 <a:cs typeface="Georgia" pitchFamily="34" charset="-120"/>
               </a:rPr>
-              <a:t>Em 1997 e 1998, Paula Rego faz uma série de obras a partir de </a:t>
+              <a:t>A lição vê a adaptação dele de </a:t>
             </a:r>
             <a:pPr indent="0" marL="0">
               <a:lnSpc>
@@ -6410,7 +6410,7 @@
                 <a:ea typeface="Georgia" pitchFamily="34" charset="-122"/>
                 <a:cs typeface="Georgia" pitchFamily="34" charset="-120"/>
               </a:rPr>
-              <a:t>O Crime do Padre Amaro</a:t>
+              <a:t>Os Maias</a:t>
             </a:r>
             <a:pPr indent="0" marL="0">
               <a:lnSpc>
@@ -6430,7 +6430,7 @@
                 <a:ea typeface="Georgia" pitchFamily="34" charset="-122"/>
                 <a:cs typeface="Georgia" pitchFamily="34" charset="-120"/>
               </a:rPr>
-              <a:t>, de Eça; a Gulbenkian mostra-a em Lisboa em 1999.</a:t>
+              <a:t>, estreada em 2014: comparas as escolhas do filme com as do romance de Eça.</a:t>
             </a:r>
             <a:endParaRPr lang="en-US" sz="2800" dirty="0"/>
           </a:p>
